--- a/flowcharts/flowcharts.pptx
+++ b/flowcharts/flowcharts.pptx
@@ -260,7 +260,7 @@
           <a:p>
             <a:fld id="{2225F40E-4D6A-4DF5-98D1-C5D2D280A6AC}" type="datetimeFigureOut">
               <a:rPr lang="en-US" smtClean="0"/>
-              <a:t>6/21/2025</a:t>
+              <a:t>8/14/2025</a:t>
             </a:fld>
             <a:endParaRPr lang="en-US"/>
           </a:p>
@@ -458,7 +458,7 @@
           <a:p>
             <a:fld id="{2225F40E-4D6A-4DF5-98D1-C5D2D280A6AC}" type="datetimeFigureOut">
               <a:rPr lang="en-US" smtClean="0"/>
-              <a:t>6/21/2025</a:t>
+              <a:t>8/14/2025</a:t>
             </a:fld>
             <a:endParaRPr lang="en-US"/>
           </a:p>
@@ -666,7 +666,7 @@
           <a:p>
             <a:fld id="{2225F40E-4D6A-4DF5-98D1-C5D2D280A6AC}" type="datetimeFigureOut">
               <a:rPr lang="en-US" smtClean="0"/>
-              <a:t>6/21/2025</a:t>
+              <a:t>8/14/2025</a:t>
             </a:fld>
             <a:endParaRPr lang="en-US"/>
           </a:p>
@@ -864,7 +864,7 @@
           <a:p>
             <a:fld id="{2225F40E-4D6A-4DF5-98D1-C5D2D280A6AC}" type="datetimeFigureOut">
               <a:rPr lang="en-US" smtClean="0"/>
-              <a:t>6/21/2025</a:t>
+              <a:t>8/14/2025</a:t>
             </a:fld>
             <a:endParaRPr lang="en-US"/>
           </a:p>
@@ -1139,7 +1139,7 @@
           <a:p>
             <a:fld id="{2225F40E-4D6A-4DF5-98D1-C5D2D280A6AC}" type="datetimeFigureOut">
               <a:rPr lang="en-US" smtClean="0"/>
-              <a:t>6/21/2025</a:t>
+              <a:t>8/14/2025</a:t>
             </a:fld>
             <a:endParaRPr lang="en-US"/>
           </a:p>
@@ -1404,7 +1404,7 @@
           <a:p>
             <a:fld id="{2225F40E-4D6A-4DF5-98D1-C5D2D280A6AC}" type="datetimeFigureOut">
               <a:rPr lang="en-US" smtClean="0"/>
-              <a:t>6/21/2025</a:t>
+              <a:t>8/14/2025</a:t>
             </a:fld>
             <a:endParaRPr lang="en-US"/>
           </a:p>
@@ -1816,7 +1816,7 @@
           <a:p>
             <a:fld id="{2225F40E-4D6A-4DF5-98D1-C5D2D280A6AC}" type="datetimeFigureOut">
               <a:rPr lang="en-US" smtClean="0"/>
-              <a:t>6/21/2025</a:t>
+              <a:t>8/14/2025</a:t>
             </a:fld>
             <a:endParaRPr lang="en-US"/>
           </a:p>
@@ -1957,7 +1957,7 @@
           <a:p>
             <a:fld id="{2225F40E-4D6A-4DF5-98D1-C5D2D280A6AC}" type="datetimeFigureOut">
               <a:rPr lang="en-US" smtClean="0"/>
-              <a:t>6/21/2025</a:t>
+              <a:t>8/14/2025</a:t>
             </a:fld>
             <a:endParaRPr lang="en-US"/>
           </a:p>
@@ -2070,7 +2070,7 @@
           <a:p>
             <a:fld id="{2225F40E-4D6A-4DF5-98D1-C5D2D280A6AC}" type="datetimeFigureOut">
               <a:rPr lang="en-US" smtClean="0"/>
-              <a:t>6/21/2025</a:t>
+              <a:t>8/14/2025</a:t>
             </a:fld>
             <a:endParaRPr lang="en-US"/>
           </a:p>
@@ -2381,7 +2381,7 @@
           <a:p>
             <a:fld id="{2225F40E-4D6A-4DF5-98D1-C5D2D280A6AC}" type="datetimeFigureOut">
               <a:rPr lang="en-US" smtClean="0"/>
-              <a:t>6/21/2025</a:t>
+              <a:t>8/14/2025</a:t>
             </a:fld>
             <a:endParaRPr lang="en-US"/>
           </a:p>
@@ -2669,7 +2669,7 @@
           <a:p>
             <a:fld id="{2225F40E-4D6A-4DF5-98D1-C5D2D280A6AC}" type="datetimeFigureOut">
               <a:rPr lang="en-US" smtClean="0"/>
-              <a:t>6/21/2025</a:t>
+              <a:t>8/14/2025</a:t>
             </a:fld>
             <a:endParaRPr lang="en-US"/>
           </a:p>
@@ -2910,7 +2910,7 @@
           <a:p>
             <a:fld id="{2225F40E-4D6A-4DF5-98D1-C5D2D280A6AC}" type="datetimeFigureOut">
               <a:rPr lang="en-US" smtClean="0"/>
-              <a:t>6/21/2025</a:t>
+              <a:t>8/14/2025</a:t>
             </a:fld>
             <a:endParaRPr lang="en-US"/>
           </a:p>
@@ -4242,7 +4242,7 @@
                   <a:latin typeface="AngsanaUPC" panose="020B0502040204020203" pitchFamily="18" charset="-34"/>
                   <a:cs typeface="AngsanaUPC" panose="020B0502040204020203" pitchFamily="18" charset="-34"/>
                 </a:rPr>
-                <a:t>Eq. 42</a:t>
+                <a:t>Eq. 44</a:t>
               </a:r>
             </a:p>
           </p:txBody>
@@ -4280,7 +4280,7 @@
                   <a:latin typeface="AngsanaUPC" panose="020B0502040204020203" pitchFamily="18" charset="-34"/>
                   <a:cs typeface="AngsanaUPC" panose="020B0502040204020203" pitchFamily="18" charset="-34"/>
                 </a:rPr>
-                <a:t>Eq. 46</a:t>
+                <a:t>Eq. 48</a:t>
               </a:r>
             </a:p>
           </p:txBody>
@@ -4794,7 +4794,7 @@
                   <a:latin typeface="AngsanaUPC" panose="020B0502040204020203" pitchFamily="18" charset="-34"/>
                   <a:cs typeface="AngsanaUPC" panose="020B0502040204020203" pitchFamily="18" charset="-34"/>
                 </a:rPr>
-                <a:t>Eq. 32</a:t>
+                <a:t>Eq. 34</a:t>
               </a:r>
             </a:p>
           </p:txBody>
@@ -4973,7 +4973,7 @@
                   <a:latin typeface="AngsanaUPC" panose="020B0502040204020203" pitchFamily="18" charset="-34"/>
                   <a:cs typeface="AngsanaUPC" panose="020B0502040204020203" pitchFamily="18" charset="-34"/>
                 </a:rPr>
-                <a:t>Eq. 65</a:t>
+                <a:t>Eq. 67</a:t>
               </a:r>
             </a:p>
           </p:txBody>
@@ -5056,7 +5056,7 @@
                   <a:latin typeface="AngsanaUPC" panose="020B0502040204020203" pitchFamily="18" charset="-34"/>
                   <a:cs typeface="AngsanaUPC" panose="020B0502040204020203" pitchFamily="18" charset="-34"/>
                 </a:rPr>
-                <a:t>Eq. 66</a:t>
+                <a:t>Eq. 68</a:t>
               </a:r>
             </a:p>
           </p:txBody>
@@ -5452,7 +5452,7 @@
                   <a:latin typeface="AngsanaUPC" panose="020B0502040204020203" pitchFamily="18" charset="-34"/>
                   <a:cs typeface="AngsanaUPC" panose="020B0502040204020203" pitchFamily="18" charset="-34"/>
                 </a:rPr>
-                <a:t>Eq. 56</a:t>
+                <a:t>Eq. 58</a:t>
               </a:r>
             </a:p>
           </p:txBody>
@@ -5665,7 +5665,7 @@
                   <a:latin typeface="AngsanaUPC" panose="020B0502040204020203" pitchFamily="18" charset="-34"/>
                   <a:cs typeface="AngsanaUPC" panose="020B0502040204020203" pitchFamily="18" charset="-34"/>
                 </a:rPr>
-                <a:t>Eq. 41</a:t>
+                <a:t>Eq. 43</a:t>
               </a:r>
             </a:p>
           </p:txBody>
